--- a/outputs/outlook-signals-presentation-v2.pptx
+++ b/outputs/outlook-signals-presentation-v2.pptx
@@ -2,25 +2,25 @@
 <file path=ppt/presentation.xml><?xml version="1.0" encoding="utf-8"?>
 <p:presentation xmlns:p="http://schemas.openxmlformats.org/presentationml/2006/main">
   <p:sldMasterIdLst>
-    <p:sldMasterId xmlns:r="http://schemas.openxmlformats.org/officeDocument/2006/relationships" id="2147483648" r:id="R3255b6e266c44205"/>
+    <p:sldMasterId xmlns:r="http://schemas.openxmlformats.org/officeDocument/2006/relationships" id="2147483648" r:id="R21ab40893d964d38"/>
   </p:sldMasterIdLst>
   <p:notesMasterIdLst>
-    <p:notesMasterId xmlns:r="http://schemas.openxmlformats.org/officeDocument/2006/relationships" r:id="Rac20bacb9d284910"/>
+    <p:notesMasterId xmlns:r="http://schemas.openxmlformats.org/officeDocument/2006/relationships" r:id="R7cbf32b075d94014"/>
   </p:notesMasterIdLst>
   <p:sldIdLst>
-    <p:sldId xmlns:r="http://schemas.openxmlformats.org/officeDocument/2006/relationships" id="256" r:id="R8acf9c73e6894836"/>
-    <p:sldId xmlns:r="http://schemas.openxmlformats.org/officeDocument/2006/relationships" id="257" r:id="R00be3a1d0e654ec5"/>
-    <p:sldId xmlns:r="http://schemas.openxmlformats.org/officeDocument/2006/relationships" id="258" r:id="Rcee2bd3625c24831"/>
-    <p:sldId xmlns:r="http://schemas.openxmlformats.org/officeDocument/2006/relationships" id="259" r:id="R454a8aedcd714fc0"/>
-    <p:sldId xmlns:r="http://schemas.openxmlformats.org/officeDocument/2006/relationships" id="260" r:id="R5c604591d21347ec"/>
-    <p:sldId xmlns:r="http://schemas.openxmlformats.org/officeDocument/2006/relationships" id="261" r:id="R80f0532b70d141e3"/>
-    <p:sldId xmlns:r="http://schemas.openxmlformats.org/officeDocument/2006/relationships" id="262" r:id="R08581b0e7ac24b3e"/>
-    <p:sldId xmlns:r="http://schemas.openxmlformats.org/officeDocument/2006/relationships" id="263" r:id="R9fea6a6e68e9422a"/>
-    <p:sldId xmlns:r="http://schemas.openxmlformats.org/officeDocument/2006/relationships" id="264" r:id="R51f35d9a41a549f8"/>
-    <p:sldId xmlns:r="http://schemas.openxmlformats.org/officeDocument/2006/relationships" id="265" r:id="Rf509257dc5ae4ca8"/>
-    <p:sldId xmlns:r="http://schemas.openxmlformats.org/officeDocument/2006/relationships" id="266" r:id="Rd6329d1768f14f77"/>
-    <p:sldId xmlns:r="http://schemas.openxmlformats.org/officeDocument/2006/relationships" id="267" r:id="R5a2b0b33306c48f9"/>
-    <p:sldId xmlns:r="http://schemas.openxmlformats.org/officeDocument/2006/relationships" id="268" r:id="R2f8f1ea2d1ed4703"/>
+    <p:sldId xmlns:r="http://schemas.openxmlformats.org/officeDocument/2006/relationships" id="256" r:id="Rb97f97767c0f4a6a"/>
+    <p:sldId xmlns:r="http://schemas.openxmlformats.org/officeDocument/2006/relationships" id="257" r:id="R5640c0c01cd34b77"/>
+    <p:sldId xmlns:r="http://schemas.openxmlformats.org/officeDocument/2006/relationships" id="258" r:id="R042bda9cdbf54291"/>
+    <p:sldId xmlns:r="http://schemas.openxmlformats.org/officeDocument/2006/relationships" id="259" r:id="Rc817de797d6845cc"/>
+    <p:sldId xmlns:r="http://schemas.openxmlformats.org/officeDocument/2006/relationships" id="260" r:id="R14c28aa33b5e47cc"/>
+    <p:sldId xmlns:r="http://schemas.openxmlformats.org/officeDocument/2006/relationships" id="261" r:id="R701ef260718f45b4"/>
+    <p:sldId xmlns:r="http://schemas.openxmlformats.org/officeDocument/2006/relationships" id="262" r:id="R4100d98219be4084"/>
+    <p:sldId xmlns:r="http://schemas.openxmlformats.org/officeDocument/2006/relationships" id="263" r:id="Rfee9abbd6d7f436e"/>
+    <p:sldId xmlns:r="http://schemas.openxmlformats.org/officeDocument/2006/relationships" id="264" r:id="Ra321bdecf79b48de"/>
+    <p:sldId xmlns:r="http://schemas.openxmlformats.org/officeDocument/2006/relationships" id="265" r:id="Rc0808db747ef45f0"/>
+    <p:sldId xmlns:r="http://schemas.openxmlformats.org/officeDocument/2006/relationships" id="266" r:id="R51f23348850b4200"/>
+    <p:sldId xmlns:r="http://schemas.openxmlformats.org/officeDocument/2006/relationships" id="267" r:id="R40cbedb56c3748e5"/>
+    <p:sldId xmlns:r="http://schemas.openxmlformats.org/officeDocument/2006/relationships" id="268" r:id="R71e695e9825c434a"/>
   </p:sldIdLst>
   <p:sldSz cx="12192000" cy="6858000"/>
   <p:notesSz cx="6858000" cy="9144000"/>
@@ -1405,7 +1405,7 @@
   </p:cSld>
   <p:clrMap bg1="lt1" tx1="dk1" bg2="lt2" tx2="dk2" accent1="accent1" accent2="accent2" accent3="accent3" accent4="accent4" accent5="accent5" accent6="accent6" hlink="hlink" folHlink="folHlink"/>
   <p:sldLayoutIdLst>
-    <p:sldLayoutId xmlns:r="http://schemas.openxmlformats.org/officeDocument/2006/relationships" id="2147483649" r:id="R0a7e6a12a9624b93"/>
+    <p:sldLayoutId xmlns:r="http://schemas.openxmlformats.org/officeDocument/2006/relationships" id="2147483649" r:id="R48ff4eb5c35a4292"/>
   </p:sldLayoutIdLst>
   <p:txStyles>
     <p:titleStyle>
@@ -1953,21 +1953,21 @@
       </p:grpSpPr>
       <p:pic>
         <p:nvPicPr>
-          <p:cNvPr id="9" name=""/>
+          <p:cNvPr id="10" name=""/>
           <p:cNvPicPr>
             <a:picLocks xmlns:a="http://schemas.openxmlformats.org/drawingml/2006/main" noChangeAspect="1"/>
           </p:cNvPicPr>
           <p:nvPr/>
         </p:nvPicPr>
         <p:blipFill>
-          <a:blip xmlns:r="http://schemas.openxmlformats.org/officeDocument/2006/relationships" xmlns:a="http://schemas.openxmlformats.org/drawingml/2006/main" r:embed="R208a8538a7bf4a88"/>
+          <a:blip xmlns:r="http://schemas.openxmlformats.org/officeDocument/2006/relationships" xmlns:a="http://schemas.openxmlformats.org/drawingml/2006/main" r:embed="R28b64565c58343b7"/>
           <a:srcRect xmlns:a="http://schemas.openxmlformats.org/drawingml/2006/main" l="23166" t="0" r="23166" b="0"/>
           <a:stretch xmlns:a="http://schemas.openxmlformats.org/drawingml/2006/main">
             <a:fillRect l="0" t="0" r="0" b="0"/>
           </a:stretch>
         </p:blipFill>
         <p:spPr>
-          <a:xfrm xmlns:a="http://schemas.openxmlformats.org/drawingml/2006/main">
+          <a:xfrm xmlns:a="http://schemas.openxmlformats.org/drawingml/2006/main" flipH="0" flipV="0">
             <a:off x="6191250" y="514350"/>
             <a:ext cx="5543550" cy="5810250"/>
           </a:xfrm>
@@ -2072,6 +2072,7 @@
           <a:lstStyle xmlns:a="http://schemas.openxmlformats.org/drawingml/2006/main"/>
           <a:p xmlns:a="http://schemas.openxmlformats.org/drawingml/2006/main">
             <a:pPr algn="l">
+              <a:buNone/>
               <a:defRPr sz="1350" b="1">
                 <a:solidFill>
                   <a:srgbClr val="B76043"/>
@@ -2082,7 +2083,7 @@
               </a:defRPr>
             </a:pPr>
             <a:r>
-              <a:t>OUTLOOK SIGNALS</a:t>
+              <a:t>OUTLOOK AI SIGNALS</a:t>
             </a:r>
           </a:p>
         </p:txBody>
@@ -2117,6 +2118,7 @@
           <a:lstStyle xmlns:a="http://schemas.openxmlformats.org/drawingml/2006/main"/>
           <a:p xmlns:a="http://schemas.openxmlformats.org/drawingml/2006/main">
             <a:pPr algn="l">
+              <a:buNone/>
               <a:defRPr sz="4350" b="1">
                 <a:solidFill>
                   <a:srgbClr val="24211D"/>
@@ -2163,6 +2165,7 @@
           <a:lstStyle xmlns:a="http://schemas.openxmlformats.org/drawingml/2006/main"/>
           <a:p xmlns:a="http://schemas.openxmlformats.org/drawingml/2006/main">
             <a:pPr algn="l">
+              <a:buNone/>
               <a:defRPr sz="1800" b="0">
                 <a:solidFill>
                   <a:srgbClr val="716B63"/>
@@ -2244,6 +2247,7 @@
           <a:lstStyle xmlns:a="http://schemas.openxmlformats.org/drawingml/2006/main"/>
           <a:p xmlns:a="http://schemas.openxmlformats.org/drawingml/2006/main">
             <a:pPr algn="ctr">
+              <a:buNone/>
               <a:defRPr sz="1200" b="1">
                 <a:solidFill>
                   <a:srgbClr val="667E95"/>
@@ -2318,6 +2322,7 @@
           <a:lstStyle xmlns:a="http://schemas.openxmlformats.org/drawingml/2006/main"/>
           <a:p xmlns:a="http://schemas.openxmlformats.org/drawingml/2006/main">
             <a:pPr algn="l">
+              <a:buNone/>
               <a:defRPr sz="1125" b="1">
                 <a:solidFill>
                   <a:srgbClr val="B76043"/>
@@ -2328,7 +2333,7 @@
               </a:defRPr>
             </a:pPr>
             <a:r>
-              <a:t>OUTLOOK SIGNALS</a:t>
+              <a:t>OUTLOOK AI SIGNALS</a:t>
             </a:r>
           </a:p>
         </p:txBody>
@@ -2363,6 +2368,7 @@
           <a:lstStyle xmlns:a="http://schemas.openxmlformats.org/drawingml/2006/main"/>
           <a:p xmlns:a="http://schemas.openxmlformats.org/drawingml/2006/main">
             <a:pPr algn="l">
+              <a:buNone/>
               <a:defRPr sz="3150" b="1">
                 <a:solidFill>
                   <a:srgbClr val="24211D"/>
@@ -2380,7 +2386,7 @@
       </p:sp>
       <p:cxnSp>
         <p:nvCxnSpPr>
-          <p:cNvPr id="27" name=""/>
+          <p:cNvPr id="47" name=""/>
           <p:cNvCxnSpPr/>
           <p:nvPr/>
         </p:nvCxnSpPr>
@@ -2430,6 +2436,7 @@
           <a:lstStyle xmlns:a="http://schemas.openxmlformats.org/drawingml/2006/main"/>
           <a:p xmlns:a="http://schemas.openxmlformats.org/drawingml/2006/main">
             <a:pPr algn="r">
+              <a:buNone/>
               <a:defRPr sz="1050" b="0">
                 <a:solidFill>
                   <a:srgbClr val="716B63"/>
@@ -2447,7 +2454,7 @@
       </p:sp>
       <p:cxnSp>
         <p:nvCxnSpPr>
-          <p:cNvPr id="29" name=""/>
+          <p:cNvPr id="49" name=""/>
           <p:cNvCxnSpPr/>
           <p:nvPr/>
         </p:nvCxnSpPr>
@@ -2469,7 +2476,7 @@
       </p:cxnSp>
       <p:cxnSp>
         <p:nvCxnSpPr>
-          <p:cNvPr id="30" name=""/>
+          <p:cNvPr id="50" name=""/>
           <p:cNvCxnSpPr/>
           <p:nvPr/>
         </p:nvCxnSpPr>
@@ -2491,7 +2498,7 @@
       </p:cxnSp>
       <p:cxnSp>
         <p:nvCxnSpPr>
-          <p:cNvPr id="31" name=""/>
+          <p:cNvPr id="51" name=""/>
           <p:cNvCxnSpPr/>
           <p:nvPr/>
         </p:nvCxnSpPr>
@@ -2513,7 +2520,7 @@
       </p:cxnSp>
       <p:cxnSp>
         <p:nvCxnSpPr>
-          <p:cNvPr id="32" name=""/>
+          <p:cNvPr id="52" name=""/>
           <p:cNvCxnSpPr/>
           <p:nvPr/>
         </p:nvCxnSpPr>
@@ -2535,7 +2542,7 @@
       </p:cxnSp>
       <p:cxnSp>
         <p:nvCxnSpPr>
-          <p:cNvPr id="33" name=""/>
+          <p:cNvPr id="53" name=""/>
           <p:cNvCxnSpPr/>
           <p:nvPr/>
         </p:nvCxnSpPr>
@@ -2557,7 +2564,7 @@
       </p:cxnSp>
       <p:cxnSp>
         <p:nvCxnSpPr>
-          <p:cNvPr id="34" name=""/>
+          <p:cNvPr id="54" name=""/>
           <p:cNvCxnSpPr/>
           <p:nvPr/>
         </p:nvCxnSpPr>
@@ -2817,6 +2824,7 @@
           <a:lstStyle xmlns:a="http://schemas.openxmlformats.org/drawingml/2006/main"/>
           <a:p xmlns:a="http://schemas.openxmlformats.org/drawingml/2006/main">
             <a:pPr algn="ctr">
+              <a:buNone/>
               <a:defRPr sz="1725" b="1">
                 <a:solidFill>
                   <a:srgbClr val="24211D"/>
@@ -2862,6 +2870,7 @@
           <a:lstStyle xmlns:a="http://schemas.openxmlformats.org/drawingml/2006/main"/>
           <a:p xmlns:a="http://schemas.openxmlformats.org/drawingml/2006/main">
             <a:pPr algn="ctr">
+              <a:buNone/>
               <a:defRPr sz="1650" b="1">
                 <a:solidFill>
                   <a:srgbClr val="24211D"/>
@@ -2908,6 +2917,7 @@
           <a:lstStyle xmlns:a="http://schemas.openxmlformats.org/drawingml/2006/main"/>
           <a:p xmlns:a="http://schemas.openxmlformats.org/drawingml/2006/main">
             <a:pPr algn="ctr">
+              <a:buNone/>
               <a:defRPr sz="1650" b="1">
                 <a:solidFill>
                   <a:srgbClr val="24211D"/>
@@ -2953,6 +2963,7 @@
           <a:lstStyle xmlns:a="http://schemas.openxmlformats.org/drawingml/2006/main"/>
           <a:p xmlns:a="http://schemas.openxmlformats.org/drawingml/2006/main">
             <a:pPr algn="ctr">
+              <a:buNone/>
               <a:defRPr sz="1650" b="1">
                 <a:solidFill>
                   <a:srgbClr val="24211D"/>
@@ -2998,6 +3009,7 @@
           <a:lstStyle xmlns:a="http://schemas.openxmlformats.org/drawingml/2006/main"/>
           <a:p xmlns:a="http://schemas.openxmlformats.org/drawingml/2006/main">
             <a:pPr algn="ctr">
+              <a:buNone/>
               <a:defRPr sz="1650" b="1">
                 <a:solidFill>
                   <a:srgbClr val="24211D"/>
@@ -3043,6 +3055,7 @@
           <a:lstStyle xmlns:a="http://schemas.openxmlformats.org/drawingml/2006/main"/>
           <a:p xmlns:a="http://schemas.openxmlformats.org/drawingml/2006/main">
             <a:pPr algn="ctr">
+              <a:buNone/>
               <a:defRPr sz="1650" b="1">
                 <a:solidFill>
                   <a:srgbClr val="B76043"/>
@@ -3088,6 +3101,7 @@
           <a:lstStyle xmlns:a="http://schemas.openxmlformats.org/drawingml/2006/main"/>
           <a:p xmlns:a="http://schemas.openxmlformats.org/drawingml/2006/main">
             <a:pPr algn="ctr">
+              <a:buNone/>
               <a:defRPr sz="1500" b="1">
                 <a:solidFill>
                   <a:srgbClr val="667E95"/>
@@ -3133,6 +3147,7 @@
           <a:lstStyle xmlns:a="http://schemas.openxmlformats.org/drawingml/2006/main"/>
           <a:p xmlns:a="http://schemas.openxmlformats.org/drawingml/2006/main">
             <a:pPr algn="ctr">
+              <a:buNone/>
               <a:defRPr sz="1500" b="1">
                 <a:solidFill>
                   <a:srgbClr val="B76043"/>
@@ -3207,6 +3222,7 @@
           <a:lstStyle xmlns:a="http://schemas.openxmlformats.org/drawingml/2006/main"/>
           <a:p xmlns:a="http://schemas.openxmlformats.org/drawingml/2006/main">
             <a:pPr algn="l">
+              <a:buNone/>
               <a:defRPr sz="1125" b="1">
                 <a:solidFill>
                   <a:srgbClr val="B76043"/>
@@ -3217,7 +3233,7 @@
               </a:defRPr>
             </a:pPr>
             <a:r>
-              <a:t>OUTLOOK SIGNALS</a:t>
+              <a:t>OUTLOOK AI SIGNALS</a:t>
             </a:r>
           </a:p>
         </p:txBody>
@@ -3252,6 +3268,7 @@
           <a:lstStyle xmlns:a="http://schemas.openxmlformats.org/drawingml/2006/main"/>
           <a:p xmlns:a="http://schemas.openxmlformats.org/drawingml/2006/main">
             <a:pPr algn="l">
+              <a:buNone/>
               <a:defRPr sz="3150" b="1">
                 <a:solidFill>
                   <a:srgbClr val="24211D"/>
@@ -3269,7 +3286,7 @@
       </p:sp>
       <p:cxnSp>
         <p:nvCxnSpPr>
-          <p:cNvPr id="31" name=""/>
+          <p:cNvPr id="45" name=""/>
           <p:cNvCxnSpPr/>
           <p:nvPr/>
         </p:nvCxnSpPr>
@@ -3319,6 +3336,7 @@
           <a:lstStyle xmlns:a="http://schemas.openxmlformats.org/drawingml/2006/main"/>
           <a:p xmlns:a="http://schemas.openxmlformats.org/drawingml/2006/main">
             <a:pPr algn="r">
+              <a:buNone/>
               <a:defRPr sz="1050" b="0">
                 <a:solidFill>
                   <a:srgbClr val="716B63"/>
@@ -3336,7 +3354,7 @@
       </p:sp>
       <p:cxnSp>
         <p:nvCxnSpPr>
-          <p:cNvPr id="33" name=""/>
+          <p:cNvPr id="47" name=""/>
           <p:cNvCxnSpPr/>
           <p:nvPr/>
         </p:nvCxnSpPr>
@@ -3358,7 +3376,7 @@
       </p:cxnSp>
       <p:cxnSp>
         <p:nvCxnSpPr>
-          <p:cNvPr id="34" name=""/>
+          <p:cNvPr id="48" name=""/>
           <p:cNvCxnSpPr/>
           <p:nvPr/>
         </p:nvCxnSpPr>
@@ -3380,7 +3398,7 @@
       </p:cxnSp>
       <p:cxnSp>
         <p:nvCxnSpPr>
-          <p:cNvPr id="35" name=""/>
+          <p:cNvPr id="49" name=""/>
           <p:cNvCxnSpPr/>
           <p:nvPr/>
         </p:nvCxnSpPr>
@@ -3570,6 +3588,7 @@
           <a:lstStyle xmlns:a="http://schemas.openxmlformats.org/drawingml/2006/main"/>
           <a:p xmlns:a="http://schemas.openxmlformats.org/drawingml/2006/main">
             <a:pPr algn="l">
+              <a:buNone/>
               <a:defRPr sz="1950" b="1">
                 <a:solidFill>
                   <a:srgbClr val="B76043"/>
@@ -3615,6 +3634,7 @@
           <a:lstStyle xmlns:a="http://schemas.openxmlformats.org/drawingml/2006/main"/>
           <a:p xmlns:a="http://schemas.openxmlformats.org/drawingml/2006/main">
             <a:pPr algn="l">
+              <a:buNone/>
               <a:defRPr sz="1575" b="1">
                 <a:solidFill>
                   <a:srgbClr val="24211D"/>
@@ -3660,6 +3680,7 @@
           <a:lstStyle xmlns:a="http://schemas.openxmlformats.org/drawingml/2006/main"/>
           <a:p xmlns:a="http://schemas.openxmlformats.org/drawingml/2006/main">
             <a:pPr algn="l">
+              <a:buNone/>
               <a:defRPr sz="1500" b="0">
                 <a:solidFill>
                   <a:srgbClr val="716B63"/>
@@ -3705,6 +3726,7 @@
           <a:lstStyle xmlns:a="http://schemas.openxmlformats.org/drawingml/2006/main"/>
           <a:p xmlns:a="http://schemas.openxmlformats.org/drawingml/2006/main">
             <a:pPr algn="l">
+              <a:buNone/>
               <a:defRPr sz="1500" b="0">
                 <a:solidFill>
                   <a:srgbClr val="716B63"/>
@@ -3754,6 +3776,7 @@
           <a:lstStyle xmlns:a="http://schemas.openxmlformats.org/drawingml/2006/main"/>
           <a:p xmlns:a="http://schemas.openxmlformats.org/drawingml/2006/main">
             <a:pPr algn="ctr">
+              <a:buNone/>
               <a:defRPr sz="1800" b="1">
                 <a:solidFill>
                   <a:srgbClr val="B76043"/>
@@ -3799,6 +3822,7 @@
           <a:lstStyle xmlns:a="http://schemas.openxmlformats.org/drawingml/2006/main"/>
           <a:p xmlns:a="http://schemas.openxmlformats.org/drawingml/2006/main">
             <a:pPr algn="ctr">
+              <a:buNone/>
               <a:defRPr sz="1350" b="1">
                 <a:solidFill>
                   <a:srgbClr val="24211D"/>
@@ -3844,6 +3868,7 @@
           <a:lstStyle xmlns:a="http://schemas.openxmlformats.org/drawingml/2006/main"/>
           <a:p xmlns:a="http://schemas.openxmlformats.org/drawingml/2006/main">
             <a:pPr algn="ctr">
+              <a:buNone/>
               <a:defRPr sz="1350" b="0">
                 <a:solidFill>
                   <a:srgbClr val="716B63"/>
@@ -3889,6 +3914,7 @@
           <a:lstStyle xmlns:a="http://schemas.openxmlformats.org/drawingml/2006/main"/>
           <a:p xmlns:a="http://schemas.openxmlformats.org/drawingml/2006/main">
             <a:pPr algn="ctr">
+              <a:buNone/>
               <a:defRPr sz="1425" b="0">
                 <a:solidFill>
                   <a:srgbClr val="716B63"/>
@@ -3936,6 +3962,7 @@
           <a:lstStyle xmlns:a="http://schemas.openxmlformats.org/drawingml/2006/main"/>
           <a:p xmlns:a="http://schemas.openxmlformats.org/drawingml/2006/main">
             <a:pPr algn="ctr">
+              <a:buNone/>
               <a:defRPr sz="1800" b="1">
                 <a:solidFill>
                   <a:srgbClr val="667E95"/>
@@ -3981,6 +4008,7 @@
           <a:lstStyle xmlns:a="http://schemas.openxmlformats.org/drawingml/2006/main"/>
           <a:p xmlns:a="http://schemas.openxmlformats.org/drawingml/2006/main">
             <a:pPr algn="ctr">
+              <a:buNone/>
               <a:defRPr sz="1350" b="1">
                 <a:solidFill>
                   <a:srgbClr val="24211D"/>
@@ -4026,6 +4054,7 @@
           <a:lstStyle xmlns:a="http://schemas.openxmlformats.org/drawingml/2006/main"/>
           <a:p xmlns:a="http://schemas.openxmlformats.org/drawingml/2006/main">
             <a:pPr algn="ctr">
+              <a:buNone/>
               <a:defRPr sz="1350" b="0">
                 <a:solidFill>
                   <a:srgbClr val="716B63"/>
@@ -4071,6 +4100,7 @@
           <a:lstStyle xmlns:a="http://schemas.openxmlformats.org/drawingml/2006/main"/>
           <a:p xmlns:a="http://schemas.openxmlformats.org/drawingml/2006/main">
             <a:pPr algn="ctr">
+              <a:buNone/>
               <a:defRPr sz="1425" b="0">
                 <a:solidFill>
                   <a:srgbClr val="716B63"/>
@@ -4118,6 +4148,7 @@
           <a:lstStyle xmlns:a="http://schemas.openxmlformats.org/drawingml/2006/main"/>
           <a:p xmlns:a="http://schemas.openxmlformats.org/drawingml/2006/main">
             <a:pPr algn="ctr">
+              <a:buNone/>
               <a:defRPr sz="1800" b="1">
                 <a:solidFill>
                   <a:srgbClr val="B76043"/>
@@ -4163,6 +4194,7 @@
           <a:lstStyle xmlns:a="http://schemas.openxmlformats.org/drawingml/2006/main"/>
           <a:p xmlns:a="http://schemas.openxmlformats.org/drawingml/2006/main">
             <a:pPr algn="ctr">
+              <a:buNone/>
               <a:defRPr sz="1350" b="1">
                 <a:solidFill>
                   <a:srgbClr val="24211D"/>
@@ -4208,6 +4240,7 @@
           <a:lstStyle xmlns:a="http://schemas.openxmlformats.org/drawingml/2006/main"/>
           <a:p xmlns:a="http://schemas.openxmlformats.org/drawingml/2006/main">
             <a:pPr algn="ctr">
+              <a:buNone/>
               <a:defRPr sz="1350" b="0">
                 <a:solidFill>
                   <a:srgbClr val="716B63"/>
@@ -4253,6 +4286,7 @@
           <a:lstStyle xmlns:a="http://schemas.openxmlformats.org/drawingml/2006/main"/>
           <a:p xmlns:a="http://schemas.openxmlformats.org/drawingml/2006/main">
             <a:pPr algn="ctr">
+              <a:buNone/>
               <a:defRPr sz="1425" b="0">
                 <a:solidFill>
                   <a:srgbClr val="716B63"/>
@@ -4300,6 +4334,7 @@
           <a:lstStyle xmlns:a="http://schemas.openxmlformats.org/drawingml/2006/main"/>
           <a:p xmlns:a="http://schemas.openxmlformats.org/drawingml/2006/main">
             <a:pPr algn="ctr">
+              <a:buNone/>
               <a:defRPr sz="1650" b="1">
                 <a:solidFill>
                   <a:srgbClr val="B76043"/>
@@ -4374,6 +4409,7 @@
           <a:lstStyle xmlns:a="http://schemas.openxmlformats.org/drawingml/2006/main"/>
           <a:p xmlns:a="http://schemas.openxmlformats.org/drawingml/2006/main">
             <a:pPr algn="l">
+              <a:buNone/>
               <a:defRPr sz="1125" b="1">
                 <a:solidFill>
                   <a:srgbClr val="B76043"/>
@@ -4384,7 +4420,7 @@
               </a:defRPr>
             </a:pPr>
             <a:r>
-              <a:t>OUTLOOK SIGNALS</a:t>
+              <a:t>OUTLOOK AI SIGNALS</a:t>
             </a:r>
           </a:p>
         </p:txBody>
@@ -4419,6 +4455,7 @@
           <a:lstStyle xmlns:a="http://schemas.openxmlformats.org/drawingml/2006/main"/>
           <a:p xmlns:a="http://schemas.openxmlformats.org/drawingml/2006/main">
             <a:pPr algn="l">
+              <a:buNone/>
               <a:defRPr sz="3150" b="1">
                 <a:solidFill>
                   <a:srgbClr val="24211D"/>
@@ -4436,7 +4473,7 @@
       </p:sp>
       <p:cxnSp>
         <p:nvCxnSpPr>
-          <p:cNvPr id="21" name=""/>
+          <p:cNvPr id="27" name=""/>
           <p:cNvCxnSpPr/>
           <p:nvPr/>
         </p:nvCxnSpPr>
@@ -4486,6 +4523,7 @@
           <a:lstStyle xmlns:a="http://schemas.openxmlformats.org/drawingml/2006/main"/>
           <a:p xmlns:a="http://schemas.openxmlformats.org/drawingml/2006/main">
             <a:pPr algn="r">
+              <a:buNone/>
               <a:defRPr sz="1050" b="0">
                 <a:solidFill>
                   <a:srgbClr val="716B63"/>
@@ -4531,6 +4569,7 @@
           <a:lstStyle xmlns:a="http://schemas.openxmlformats.org/drawingml/2006/main"/>
           <a:p xmlns:a="http://schemas.openxmlformats.org/drawingml/2006/main">
             <a:pPr algn="ctr">
+              <a:buNone/>
               <a:defRPr sz="1725" b="0">
                 <a:solidFill>
                   <a:srgbClr val="716B63"/>
@@ -4611,6 +4650,7 @@
           <a:lstStyle xmlns:a="http://schemas.openxmlformats.org/drawingml/2006/main"/>
           <a:p xmlns:a="http://schemas.openxmlformats.org/drawingml/2006/main">
             <a:pPr algn="l">
+              <a:buNone/>
               <a:defRPr sz="4050" b="1">
                 <a:solidFill>
                   <a:srgbClr val="B76043"/>
@@ -4656,6 +4696,7 @@
           <a:lstStyle xmlns:a="http://schemas.openxmlformats.org/drawingml/2006/main"/>
           <a:p xmlns:a="http://schemas.openxmlformats.org/drawingml/2006/main">
             <a:pPr algn="l">
+              <a:buNone/>
               <a:defRPr sz="1650" b="1">
                 <a:solidFill>
                   <a:srgbClr val="24211D"/>
@@ -4701,6 +4742,7 @@
           <a:lstStyle xmlns:a="http://schemas.openxmlformats.org/drawingml/2006/main"/>
           <a:p xmlns:a="http://schemas.openxmlformats.org/drawingml/2006/main">
             <a:pPr algn="l">
+              <a:buNone/>
               <a:defRPr sz="1350" b="0">
                 <a:solidFill>
                   <a:srgbClr val="716B63"/>
@@ -4781,6 +4823,7 @@
           <a:lstStyle xmlns:a="http://schemas.openxmlformats.org/drawingml/2006/main"/>
           <a:p xmlns:a="http://schemas.openxmlformats.org/drawingml/2006/main">
             <a:pPr algn="l">
+              <a:buNone/>
               <a:defRPr sz="4050" b="1">
                 <a:solidFill>
                   <a:srgbClr val="667E95"/>
@@ -4826,6 +4869,7 @@
           <a:lstStyle xmlns:a="http://schemas.openxmlformats.org/drawingml/2006/main"/>
           <a:p xmlns:a="http://schemas.openxmlformats.org/drawingml/2006/main">
             <a:pPr algn="l">
+              <a:buNone/>
               <a:defRPr sz="1650" b="1">
                 <a:solidFill>
                   <a:srgbClr val="24211D"/>
@@ -4871,6 +4915,7 @@
           <a:lstStyle xmlns:a="http://schemas.openxmlformats.org/drawingml/2006/main"/>
           <a:p xmlns:a="http://schemas.openxmlformats.org/drawingml/2006/main">
             <a:pPr algn="l">
+              <a:buNone/>
               <a:defRPr sz="1350" b="0">
                 <a:solidFill>
                   <a:srgbClr val="716B63"/>
@@ -4951,6 +4996,7 @@
           <a:lstStyle xmlns:a="http://schemas.openxmlformats.org/drawingml/2006/main"/>
           <a:p xmlns:a="http://schemas.openxmlformats.org/drawingml/2006/main">
             <a:pPr algn="l">
+              <a:buNone/>
               <a:defRPr sz="4050" b="1">
                 <a:solidFill>
                   <a:srgbClr val="B76043"/>
@@ -4996,6 +5042,7 @@
           <a:lstStyle xmlns:a="http://schemas.openxmlformats.org/drawingml/2006/main"/>
           <a:p xmlns:a="http://schemas.openxmlformats.org/drawingml/2006/main">
             <a:pPr algn="l">
+              <a:buNone/>
               <a:defRPr sz="1650" b="1">
                 <a:solidFill>
                   <a:srgbClr val="24211D"/>
@@ -5041,6 +5088,7 @@
           <a:lstStyle xmlns:a="http://schemas.openxmlformats.org/drawingml/2006/main"/>
           <a:p xmlns:a="http://schemas.openxmlformats.org/drawingml/2006/main">
             <a:pPr algn="l">
+              <a:buNone/>
               <a:defRPr sz="1350" b="0">
                 <a:solidFill>
                   <a:srgbClr val="716B63"/>
@@ -5086,6 +5134,7 @@
           <a:lstStyle xmlns:a="http://schemas.openxmlformats.org/drawingml/2006/main"/>
           <a:p xmlns:a="http://schemas.openxmlformats.org/drawingml/2006/main">
             <a:pPr algn="ctr">
+              <a:buNone/>
               <a:defRPr sz="1500" b="1">
                 <a:solidFill>
                   <a:srgbClr val="B76043"/>
@@ -5160,6 +5209,7 @@
           <a:lstStyle xmlns:a="http://schemas.openxmlformats.org/drawingml/2006/main"/>
           <a:p xmlns:a="http://schemas.openxmlformats.org/drawingml/2006/main">
             <a:pPr algn="l">
+              <a:buNone/>
               <a:defRPr sz="1350" b="1">
                 <a:solidFill>
                   <a:srgbClr val="F1DDD3"/>
@@ -5170,7 +5220,7 @@
               </a:defRPr>
             </a:pPr>
             <a:r>
-              <a:t>OUTLOOK SIGNALS</a:t>
+              <a:t>OUTLOOK AI SIGNALS</a:t>
             </a:r>
           </a:p>
         </p:txBody>
@@ -5205,6 +5255,7 @@
           <a:lstStyle xmlns:a="http://schemas.openxmlformats.org/drawingml/2006/main"/>
           <a:p xmlns:a="http://schemas.openxmlformats.org/drawingml/2006/main">
             <a:pPr algn="ctr">
+              <a:buNone/>
               <a:defRPr sz="4050" b="1">
                 <a:solidFill>
                   <a:srgbClr val="FFFFFF"/>
@@ -5223,7 +5274,7 @@
       </p:sp>
       <p:cxnSp>
         <p:nvCxnSpPr>
-          <p:cNvPr id="13" name=""/>
+          <p:cNvPr id="19" name=""/>
           <p:cNvCxnSpPr/>
           <p:nvPr/>
         </p:nvCxnSpPr>
@@ -5372,6 +5423,7 @@
           <a:lstStyle xmlns:a="http://schemas.openxmlformats.org/drawingml/2006/main"/>
           <a:p xmlns:a="http://schemas.openxmlformats.org/drawingml/2006/main">
             <a:pPr algn="ctr">
+              <a:buNone/>
               <a:defRPr sz="1650" b="1">
                 <a:solidFill>
                   <a:srgbClr val="FFFFFF"/>
@@ -5417,6 +5469,7 @@
           <a:lstStyle xmlns:a="http://schemas.openxmlformats.org/drawingml/2006/main"/>
           <a:p xmlns:a="http://schemas.openxmlformats.org/drawingml/2006/main">
             <a:pPr algn="ctr">
+              <a:buNone/>
               <a:defRPr sz="1650" b="1">
                 <a:solidFill>
                   <a:srgbClr val="FFFFFF"/>
@@ -5462,6 +5515,7 @@
           <a:lstStyle xmlns:a="http://schemas.openxmlformats.org/drawingml/2006/main"/>
           <a:p xmlns:a="http://schemas.openxmlformats.org/drawingml/2006/main">
             <a:pPr algn="ctr">
+              <a:buNone/>
               <a:defRPr sz="1650" b="1">
                 <a:solidFill>
                   <a:srgbClr val="FFFFFF"/>
@@ -5507,6 +5561,7 @@
           <a:lstStyle xmlns:a="http://schemas.openxmlformats.org/drawingml/2006/main"/>
           <a:p xmlns:a="http://schemas.openxmlformats.org/drawingml/2006/main">
             <a:pPr algn="ctr">
+              <a:buNone/>
               <a:defRPr sz="1800" b="0">
                 <a:solidFill>
                   <a:srgbClr val="F1DDD3"/>
@@ -5581,6 +5636,7 @@
           <a:lstStyle xmlns:a="http://schemas.openxmlformats.org/drawingml/2006/main"/>
           <a:p xmlns:a="http://schemas.openxmlformats.org/drawingml/2006/main">
             <a:pPr algn="l">
+              <a:buNone/>
               <a:defRPr sz="1125" b="1">
                 <a:solidFill>
                   <a:srgbClr val="B76043"/>
@@ -5591,7 +5647,7 @@
               </a:defRPr>
             </a:pPr>
             <a:r>
-              <a:t>OUTLOOK SIGNALS</a:t>
+              <a:t>OUTLOOK AI SIGNALS</a:t>
             </a:r>
           </a:p>
         </p:txBody>
@@ -5626,6 +5682,7 @@
           <a:lstStyle xmlns:a="http://schemas.openxmlformats.org/drawingml/2006/main"/>
           <a:p xmlns:a="http://schemas.openxmlformats.org/drawingml/2006/main">
             <a:pPr algn="l">
+              <a:buNone/>
               <a:defRPr sz="3150" b="1">
                 <a:solidFill>
                   <a:srgbClr val="24211D"/>
@@ -5643,7 +5700,7 @@
       </p:sp>
       <p:cxnSp>
         <p:nvCxnSpPr>
-          <p:cNvPr id="20" name=""/>
+          <p:cNvPr id="26" name=""/>
           <p:cNvCxnSpPr/>
           <p:nvPr/>
         </p:nvCxnSpPr>
@@ -5693,6 +5750,7 @@
           <a:lstStyle xmlns:a="http://schemas.openxmlformats.org/drawingml/2006/main"/>
           <a:p xmlns:a="http://schemas.openxmlformats.org/drawingml/2006/main">
             <a:pPr algn="r">
+              <a:buNone/>
               <a:defRPr sz="1050" b="0">
                 <a:solidFill>
                   <a:srgbClr val="716B63"/>
@@ -5773,6 +5831,7 @@
           <a:lstStyle xmlns:a="http://schemas.openxmlformats.org/drawingml/2006/main"/>
           <a:p xmlns:a="http://schemas.openxmlformats.org/drawingml/2006/main">
             <a:pPr algn="l">
+              <a:buNone/>
               <a:defRPr sz="1500" b="1">
                 <a:solidFill>
                   <a:srgbClr val="B76043"/>
@@ -5818,6 +5877,7 @@
           <a:lstStyle xmlns:a="http://schemas.openxmlformats.org/drawingml/2006/main"/>
           <a:p xmlns:a="http://schemas.openxmlformats.org/drawingml/2006/main">
             <a:pPr algn="l">
+              <a:buNone/>
               <a:defRPr sz="2250" b="1">
                 <a:solidFill>
                   <a:srgbClr val="24211D"/>
@@ -5863,6 +5923,7 @@
           <a:lstStyle xmlns:a="http://schemas.openxmlformats.org/drawingml/2006/main"/>
           <a:p xmlns:a="http://schemas.openxmlformats.org/drawingml/2006/main">
             <a:pPr algn="l">
+              <a:buNone/>
               <a:defRPr sz="1500" b="0">
                 <a:solidFill>
                   <a:srgbClr val="716B63"/>
@@ -5944,6 +6005,7 @@
           <a:lstStyle xmlns:a="http://schemas.openxmlformats.org/drawingml/2006/main"/>
           <a:p xmlns:a="http://schemas.openxmlformats.org/drawingml/2006/main">
             <a:pPr algn="l">
+              <a:buNone/>
               <a:defRPr sz="1500" b="1">
                 <a:solidFill>
                   <a:srgbClr val="667E95"/>
@@ -5989,6 +6051,7 @@
           <a:lstStyle xmlns:a="http://schemas.openxmlformats.org/drawingml/2006/main"/>
           <a:p xmlns:a="http://schemas.openxmlformats.org/drawingml/2006/main">
             <a:pPr algn="l">
+              <a:buNone/>
               <a:defRPr sz="2250" b="1">
                 <a:solidFill>
                   <a:srgbClr val="24211D"/>
@@ -6034,6 +6097,7 @@
           <a:lstStyle xmlns:a="http://schemas.openxmlformats.org/drawingml/2006/main"/>
           <a:p xmlns:a="http://schemas.openxmlformats.org/drawingml/2006/main">
             <a:pPr algn="l">
+              <a:buNone/>
               <a:defRPr sz="1500" b="0">
                 <a:solidFill>
                   <a:srgbClr val="716B63"/>
@@ -6115,6 +6179,7 @@
           <a:lstStyle xmlns:a="http://schemas.openxmlformats.org/drawingml/2006/main"/>
           <a:p xmlns:a="http://schemas.openxmlformats.org/drawingml/2006/main">
             <a:pPr algn="l">
+              <a:buNone/>
               <a:defRPr sz="1500" b="1">
                 <a:solidFill>
                   <a:srgbClr val="B76043"/>
@@ -6160,6 +6225,7 @@
           <a:lstStyle xmlns:a="http://schemas.openxmlformats.org/drawingml/2006/main"/>
           <a:p xmlns:a="http://schemas.openxmlformats.org/drawingml/2006/main">
             <a:pPr algn="l">
+              <a:buNone/>
               <a:defRPr sz="2250" b="1">
                 <a:solidFill>
                   <a:srgbClr val="24211D"/>
@@ -6205,6 +6271,7 @@
           <a:lstStyle xmlns:a="http://schemas.openxmlformats.org/drawingml/2006/main"/>
           <a:p xmlns:a="http://schemas.openxmlformats.org/drawingml/2006/main">
             <a:pPr algn="l">
+              <a:buNone/>
               <a:defRPr sz="1500" b="0">
                 <a:solidFill>
                   <a:srgbClr val="716B63"/>
@@ -6251,6 +6318,7 @@
           <a:lstStyle xmlns:a="http://schemas.openxmlformats.org/drawingml/2006/main"/>
           <a:p xmlns:a="http://schemas.openxmlformats.org/drawingml/2006/main">
             <a:pPr algn="ctr">
+              <a:buNone/>
               <a:defRPr sz="2025" b="1">
                 <a:solidFill>
                   <a:srgbClr val="24211D"/>
@@ -6325,6 +6393,7 @@
           <a:lstStyle xmlns:a="http://schemas.openxmlformats.org/drawingml/2006/main"/>
           <a:p xmlns:a="http://schemas.openxmlformats.org/drawingml/2006/main">
             <a:pPr algn="l">
+              <a:buNone/>
               <a:defRPr sz="1125" b="1">
                 <a:solidFill>
                   <a:srgbClr val="B76043"/>
@@ -6335,7 +6404,7 @@
               </a:defRPr>
             </a:pPr>
             <a:r>
-              <a:t>OUTLOOK SIGNALS</a:t>
+              <a:t>OUTLOOK AI SIGNALS</a:t>
             </a:r>
           </a:p>
         </p:txBody>
@@ -6370,6 +6439,7 @@
           <a:lstStyle xmlns:a="http://schemas.openxmlformats.org/drawingml/2006/main"/>
           <a:p xmlns:a="http://schemas.openxmlformats.org/drawingml/2006/main">
             <a:pPr algn="l">
+              <a:buNone/>
               <a:defRPr sz="3150" b="1">
                 <a:solidFill>
                   <a:srgbClr val="24211D"/>
@@ -6387,7 +6457,7 @@
       </p:sp>
       <p:cxnSp>
         <p:nvCxnSpPr>
-          <p:cNvPr id="25" name=""/>
+          <p:cNvPr id="61" name=""/>
           <p:cNvCxnSpPr/>
           <p:nvPr/>
         </p:nvCxnSpPr>
@@ -6437,6 +6507,7 @@
           <a:lstStyle xmlns:a="http://schemas.openxmlformats.org/drawingml/2006/main"/>
           <a:p xmlns:a="http://schemas.openxmlformats.org/drawingml/2006/main">
             <a:pPr algn="r">
+              <a:buNone/>
               <a:defRPr sz="1050" b="0">
                 <a:solidFill>
                   <a:srgbClr val="716B63"/>
@@ -6482,6 +6553,7 @@
           <a:lstStyle xmlns:a="http://schemas.openxmlformats.org/drawingml/2006/main"/>
           <a:p xmlns:a="http://schemas.openxmlformats.org/drawingml/2006/main">
             <a:pPr algn="l">
+              <a:buNone/>
               <a:defRPr sz="1650" b="1">
                 <a:solidFill>
                   <a:srgbClr val="716B63"/>
@@ -6527,6 +6599,7 @@
           <a:lstStyle xmlns:a="http://schemas.openxmlformats.org/drawingml/2006/main"/>
           <a:p xmlns:a="http://schemas.openxmlformats.org/drawingml/2006/main">
             <a:pPr algn="l">
+              <a:buNone/>
               <a:defRPr sz="2100" b="1">
                 <a:solidFill>
                   <a:srgbClr val="24211D"/>
@@ -6547,7 +6620,7 @@
       </p:sp>
       <p:cxnSp>
         <p:nvCxnSpPr>
-          <p:cNvPr id="29" name=""/>
+          <p:cNvPr id="65" name=""/>
           <p:cNvCxnSpPr/>
           <p:nvPr/>
         </p:nvCxnSpPr>
@@ -6630,6 +6703,7 @@
           <a:lstStyle xmlns:a="http://schemas.openxmlformats.org/drawingml/2006/main"/>
           <a:p xmlns:a="http://schemas.openxmlformats.org/drawingml/2006/main">
             <a:pPr algn="l">
+              <a:buNone/>
               <a:defRPr sz="1650" b="1">
                 <a:solidFill>
                   <a:srgbClr val="716B63"/>
@@ -6647,7 +6721,7 @@
       </p:sp>
       <p:cxnSp>
         <p:nvCxnSpPr>
-          <p:cNvPr id="32" name=""/>
+          <p:cNvPr id="68" name=""/>
           <p:cNvCxnSpPr/>
           <p:nvPr/>
         </p:nvCxnSpPr>
@@ -6669,7 +6743,7 @@
       </p:cxnSp>
       <p:cxnSp>
         <p:nvCxnSpPr>
-          <p:cNvPr id="33" name=""/>
+          <p:cNvPr id="69" name=""/>
           <p:cNvCxnSpPr/>
           <p:nvPr/>
         </p:nvCxnSpPr>
@@ -6691,7 +6765,7 @@
       </p:cxnSp>
       <p:cxnSp>
         <p:nvCxnSpPr>
-          <p:cNvPr id="34" name=""/>
+          <p:cNvPr id="70" name=""/>
           <p:cNvCxnSpPr/>
           <p:nvPr/>
         </p:nvCxnSpPr>
@@ -6713,7 +6787,7 @@
       </p:cxnSp>
       <p:cxnSp>
         <p:nvCxnSpPr>
-          <p:cNvPr id="35" name=""/>
+          <p:cNvPr id="71" name=""/>
           <p:cNvCxnSpPr/>
           <p:nvPr/>
         </p:nvCxnSpPr>
@@ -6735,7 +6809,7 @@
       </p:cxnSp>
       <p:cxnSp>
         <p:nvCxnSpPr>
-          <p:cNvPr id="36" name=""/>
+          <p:cNvPr id="72" name=""/>
           <p:cNvCxnSpPr/>
           <p:nvPr/>
         </p:nvCxnSpPr>
@@ -6757,7 +6831,7 @@
       </p:cxnSp>
       <p:cxnSp>
         <p:nvCxnSpPr>
-          <p:cNvPr id="37" name=""/>
+          <p:cNvPr id="73" name=""/>
           <p:cNvCxnSpPr/>
           <p:nvPr/>
         </p:nvCxnSpPr>
@@ -6779,7 +6853,7 @@
       </p:cxnSp>
       <p:cxnSp>
         <p:nvCxnSpPr>
-          <p:cNvPr id="38" name=""/>
+          <p:cNvPr id="74" name=""/>
           <p:cNvCxnSpPr/>
           <p:nvPr/>
         </p:nvCxnSpPr>
@@ -6801,7 +6875,7 @@
       </p:cxnSp>
       <p:cxnSp>
         <p:nvCxnSpPr>
-          <p:cNvPr id="39" name=""/>
+          <p:cNvPr id="75" name=""/>
           <p:cNvCxnSpPr/>
           <p:nvPr/>
         </p:nvCxnSpPr>
@@ -6823,7 +6897,7 @@
       </p:cxnSp>
       <p:cxnSp>
         <p:nvCxnSpPr>
-          <p:cNvPr id="40" name=""/>
+          <p:cNvPr id="76" name=""/>
           <p:cNvCxnSpPr/>
           <p:nvPr/>
         </p:nvCxnSpPr>
@@ -6906,6 +6980,7 @@
           <a:lstStyle xmlns:a="http://schemas.openxmlformats.org/drawingml/2006/main"/>
           <a:p xmlns:a="http://schemas.openxmlformats.org/drawingml/2006/main">
             <a:pPr algn="l">
+              <a:buNone/>
               <a:defRPr sz="2100" b="1">
                 <a:solidFill>
                   <a:srgbClr val="B76043"/>
@@ -6951,6 +7026,7 @@
           <a:lstStyle xmlns:a="http://schemas.openxmlformats.org/drawingml/2006/main"/>
           <a:p xmlns:a="http://schemas.openxmlformats.org/drawingml/2006/main">
             <a:pPr algn="l">
+              <a:buNone/>
               <a:defRPr sz="2100" b="1">
                 <a:solidFill>
                   <a:srgbClr val="667E95"/>
@@ -6996,6 +7072,7 @@
           <a:lstStyle xmlns:a="http://schemas.openxmlformats.org/drawingml/2006/main"/>
           <a:p xmlns:a="http://schemas.openxmlformats.org/drawingml/2006/main">
             <a:pPr algn="ctr">
+              <a:buNone/>
               <a:defRPr sz="1875" b="1">
                 <a:solidFill>
                   <a:srgbClr val="24211D"/>
@@ -7070,6 +7147,7 @@
           <a:lstStyle xmlns:a="http://schemas.openxmlformats.org/drawingml/2006/main"/>
           <a:p xmlns:a="http://schemas.openxmlformats.org/drawingml/2006/main">
             <a:pPr algn="l">
+              <a:buNone/>
               <a:defRPr sz="1125" b="1">
                 <a:solidFill>
                   <a:srgbClr val="B76043"/>
@@ -7080,7 +7158,7 @@
               </a:defRPr>
             </a:pPr>
             <a:r>
-              <a:t>OUTLOOK SIGNALS</a:t>
+              <a:t>OUTLOOK AI SIGNALS</a:t>
             </a:r>
           </a:p>
         </p:txBody>
@@ -7115,6 +7193,7 @@
           <a:lstStyle xmlns:a="http://schemas.openxmlformats.org/drawingml/2006/main"/>
           <a:p xmlns:a="http://schemas.openxmlformats.org/drawingml/2006/main">
             <a:pPr algn="l">
+              <a:buNone/>
               <a:defRPr sz="3150" b="1">
                 <a:solidFill>
                   <a:srgbClr val="24211D"/>
@@ -7132,7 +7211,7 @@
       </p:sp>
       <p:cxnSp>
         <p:nvCxnSpPr>
-          <p:cNvPr id="26" name=""/>
+          <p:cNvPr id="40" name=""/>
           <p:cNvCxnSpPr/>
           <p:nvPr/>
         </p:nvCxnSpPr>
@@ -7182,6 +7261,7 @@
           <a:lstStyle xmlns:a="http://schemas.openxmlformats.org/drawingml/2006/main"/>
           <a:p xmlns:a="http://schemas.openxmlformats.org/drawingml/2006/main">
             <a:pPr algn="r">
+              <a:buNone/>
               <a:defRPr sz="1050" b="0">
                 <a:solidFill>
                   <a:srgbClr val="716B63"/>
@@ -7199,7 +7279,7 @@
       </p:sp>
       <p:cxnSp>
         <p:nvCxnSpPr>
-          <p:cNvPr id="28" name=""/>
+          <p:cNvPr id="42" name=""/>
           <p:cNvCxnSpPr/>
           <p:nvPr/>
         </p:nvCxnSpPr>
@@ -7221,7 +7301,7 @@
       </p:cxnSp>
       <p:cxnSp>
         <p:nvCxnSpPr>
-          <p:cNvPr id="29" name=""/>
+          <p:cNvPr id="43" name=""/>
           <p:cNvCxnSpPr/>
           <p:nvPr/>
         </p:nvCxnSpPr>
@@ -7243,7 +7323,7 @@
       </p:cxnSp>
       <p:cxnSp>
         <p:nvCxnSpPr>
-          <p:cNvPr id="30" name=""/>
+          <p:cNvPr id="44" name=""/>
           <p:cNvCxnSpPr/>
           <p:nvPr/>
         </p:nvCxnSpPr>
@@ -7326,6 +7406,7 @@
           <a:lstStyle xmlns:a="http://schemas.openxmlformats.org/drawingml/2006/main"/>
           <a:p xmlns:a="http://schemas.openxmlformats.org/drawingml/2006/main">
             <a:pPr algn="ctr">
+              <a:buNone/>
               <a:defRPr sz="1500" b="1">
                 <a:solidFill>
                   <a:srgbClr val="FFFFFF"/>
@@ -7371,6 +7452,7 @@
           <a:lstStyle xmlns:a="http://schemas.openxmlformats.org/drawingml/2006/main"/>
           <a:p xmlns:a="http://schemas.openxmlformats.org/drawingml/2006/main">
             <a:pPr algn="ctr">
+              <a:buNone/>
               <a:defRPr sz="2025" b="1">
                 <a:solidFill>
                   <a:srgbClr val="24211D"/>
@@ -7416,6 +7498,7 @@
           <a:lstStyle xmlns:a="http://schemas.openxmlformats.org/drawingml/2006/main"/>
           <a:p xmlns:a="http://schemas.openxmlformats.org/drawingml/2006/main">
             <a:pPr algn="ctr">
+              <a:buNone/>
               <a:defRPr sz="1425" b="0">
                 <a:solidFill>
                   <a:srgbClr val="716B63"/>
@@ -7495,6 +7578,7 @@
           <a:lstStyle xmlns:a="http://schemas.openxmlformats.org/drawingml/2006/main"/>
           <a:p xmlns:a="http://schemas.openxmlformats.org/drawingml/2006/main">
             <a:pPr algn="ctr">
+              <a:buNone/>
               <a:defRPr sz="1500" b="1">
                 <a:solidFill>
                   <a:srgbClr val="FFFFFF"/>
@@ -7540,6 +7624,7 @@
           <a:lstStyle xmlns:a="http://schemas.openxmlformats.org/drawingml/2006/main"/>
           <a:p xmlns:a="http://schemas.openxmlformats.org/drawingml/2006/main">
             <a:pPr algn="ctr">
+              <a:buNone/>
               <a:defRPr sz="2025" b="1">
                 <a:solidFill>
                   <a:srgbClr val="24211D"/>
@@ -7585,6 +7670,7 @@
           <a:lstStyle xmlns:a="http://schemas.openxmlformats.org/drawingml/2006/main"/>
           <a:p xmlns:a="http://schemas.openxmlformats.org/drawingml/2006/main">
             <a:pPr algn="ctr">
+              <a:buNone/>
               <a:defRPr sz="1425" b="0">
                 <a:solidFill>
                   <a:srgbClr val="716B63"/>
@@ -7664,6 +7750,7 @@
           <a:lstStyle xmlns:a="http://schemas.openxmlformats.org/drawingml/2006/main"/>
           <a:p xmlns:a="http://schemas.openxmlformats.org/drawingml/2006/main">
             <a:pPr algn="ctr">
+              <a:buNone/>
               <a:defRPr sz="1500" b="1">
                 <a:solidFill>
                   <a:srgbClr val="FFFFFF"/>
@@ -7709,6 +7796,7 @@
           <a:lstStyle xmlns:a="http://schemas.openxmlformats.org/drawingml/2006/main"/>
           <a:p xmlns:a="http://schemas.openxmlformats.org/drawingml/2006/main">
             <a:pPr algn="ctr">
+              <a:buNone/>
               <a:defRPr sz="2025" b="1">
                 <a:solidFill>
                   <a:srgbClr val="24211D"/>
@@ -7754,6 +7842,7 @@
           <a:lstStyle xmlns:a="http://schemas.openxmlformats.org/drawingml/2006/main"/>
           <a:p xmlns:a="http://schemas.openxmlformats.org/drawingml/2006/main">
             <a:pPr algn="ctr">
+              <a:buNone/>
               <a:defRPr sz="1425" b="0">
                 <a:solidFill>
                   <a:srgbClr val="716B63"/>
@@ -7833,6 +7922,7 @@
           <a:lstStyle xmlns:a="http://schemas.openxmlformats.org/drawingml/2006/main"/>
           <a:p xmlns:a="http://schemas.openxmlformats.org/drawingml/2006/main">
             <a:pPr algn="ctr">
+              <a:buNone/>
               <a:defRPr sz="1500" b="1">
                 <a:solidFill>
                   <a:srgbClr val="FFFFFF"/>
@@ -7878,6 +7968,7 @@
           <a:lstStyle xmlns:a="http://schemas.openxmlformats.org/drawingml/2006/main"/>
           <a:p xmlns:a="http://schemas.openxmlformats.org/drawingml/2006/main">
             <a:pPr algn="ctr">
+              <a:buNone/>
               <a:defRPr sz="2025" b="1">
                 <a:solidFill>
                   <a:srgbClr val="24211D"/>
@@ -7923,6 +8014,7 @@
           <a:lstStyle xmlns:a="http://schemas.openxmlformats.org/drawingml/2006/main"/>
           <a:p xmlns:a="http://schemas.openxmlformats.org/drawingml/2006/main">
             <a:pPr algn="ctr">
+              <a:buNone/>
               <a:defRPr sz="1425" b="0">
                 <a:solidFill>
                   <a:srgbClr val="716B63"/>
@@ -7998,6 +8090,7 @@
           <a:lstStyle xmlns:a="http://schemas.openxmlformats.org/drawingml/2006/main"/>
           <a:p xmlns:a="http://schemas.openxmlformats.org/drawingml/2006/main">
             <a:pPr algn="l">
+              <a:buNone/>
               <a:defRPr sz="1125" b="1">
                 <a:solidFill>
                   <a:srgbClr val="B76043"/>
@@ -8008,7 +8101,7 @@
               </a:defRPr>
             </a:pPr>
             <a:r>
-              <a:t>OUTLOOK SIGNALS</a:t>
+              <a:t>OUTLOOK AI SIGNALS</a:t>
             </a:r>
           </a:p>
         </p:txBody>
@@ -8043,6 +8136,7 @@
           <a:lstStyle xmlns:a="http://schemas.openxmlformats.org/drawingml/2006/main"/>
           <a:p xmlns:a="http://schemas.openxmlformats.org/drawingml/2006/main">
             <a:pPr algn="l">
+              <a:buNone/>
               <a:defRPr sz="3150" b="1">
                 <a:solidFill>
                   <a:srgbClr val="24211D"/>
@@ -8060,7 +8154,7 @@
       </p:sp>
       <p:cxnSp>
         <p:nvCxnSpPr>
-          <p:cNvPr id="35" name=""/>
+          <p:cNvPr id="83" name=""/>
           <p:cNvCxnSpPr/>
           <p:nvPr/>
         </p:nvCxnSpPr>
@@ -8110,6 +8204,7 @@
           <a:lstStyle xmlns:a="http://schemas.openxmlformats.org/drawingml/2006/main"/>
           <a:p xmlns:a="http://schemas.openxmlformats.org/drawingml/2006/main">
             <a:pPr algn="r">
+              <a:buNone/>
               <a:defRPr sz="1050" b="0">
                 <a:solidFill>
                   <a:srgbClr val="716B63"/>
@@ -8190,6 +8285,7 @@
           <a:lstStyle xmlns:a="http://schemas.openxmlformats.org/drawingml/2006/main"/>
           <a:p xmlns:a="http://schemas.openxmlformats.org/drawingml/2006/main">
             <a:pPr algn="l">
+              <a:buNone/>
               <a:defRPr sz="2100" b="1">
                 <a:solidFill>
                   <a:srgbClr val="24211D"/>
@@ -8235,6 +8331,7 @@
           <a:lstStyle xmlns:a="http://schemas.openxmlformats.org/drawingml/2006/main"/>
           <a:p xmlns:a="http://schemas.openxmlformats.org/drawingml/2006/main">
             <a:pPr algn="r">
+              <a:buNone/>
               <a:defRPr sz="1200" b="0">
                 <a:solidFill>
                   <a:srgbClr val="716B63"/>
@@ -8315,6 +8412,7 @@
           <a:lstStyle xmlns:a="http://schemas.openxmlformats.org/drawingml/2006/main"/>
           <a:p xmlns:a="http://schemas.openxmlformats.org/drawingml/2006/main">
             <a:pPr algn="ctr">
+              <a:buNone/>
               <a:defRPr sz="1200" b="1">
                 <a:solidFill>
                   <a:srgbClr val="B76043"/>
@@ -8395,6 +8493,7 @@
           <a:lstStyle xmlns:a="http://schemas.openxmlformats.org/drawingml/2006/main"/>
           <a:p xmlns:a="http://schemas.openxmlformats.org/drawingml/2006/main">
             <a:pPr algn="ctr">
+              <a:buNone/>
               <a:defRPr sz="1200" b="1">
                 <a:solidFill>
                   <a:srgbClr val="716B63"/>
@@ -8412,7 +8511,7 @@
       </p:sp>
       <p:cxnSp>
         <p:nvCxnSpPr>
-          <p:cNvPr id="44" name=""/>
+          <p:cNvPr id="92" name=""/>
           <p:cNvCxnSpPr/>
           <p:nvPr/>
         </p:nvCxnSpPr>
@@ -8462,6 +8561,7 @@
           <a:lstStyle xmlns:a="http://schemas.openxmlformats.org/drawingml/2006/main"/>
           <a:p xmlns:a="http://schemas.openxmlformats.org/drawingml/2006/main">
             <a:pPr algn="l">
+              <a:buNone/>
               <a:defRPr sz="1650" b="1">
                 <a:solidFill>
                   <a:srgbClr val="24211D"/>
@@ -8507,6 +8607,7 @@
           <a:lstStyle xmlns:a="http://schemas.openxmlformats.org/drawingml/2006/main"/>
           <a:p xmlns:a="http://schemas.openxmlformats.org/drawingml/2006/main">
             <a:pPr algn="l">
+              <a:buNone/>
               <a:defRPr sz="1200" b="0">
                 <a:solidFill>
                   <a:srgbClr val="716B63"/>
@@ -8552,6 +8653,7 @@
           <a:lstStyle xmlns:a="http://schemas.openxmlformats.org/drawingml/2006/main"/>
           <a:p xmlns:a="http://schemas.openxmlformats.org/drawingml/2006/main">
             <a:pPr algn="r">
+              <a:buNone/>
               <a:defRPr sz="2100" b="1">
                 <a:solidFill>
                   <a:srgbClr val="B76043"/>
@@ -8597,6 +8699,7 @@
           <a:lstStyle xmlns:a="http://schemas.openxmlformats.org/drawingml/2006/main"/>
           <a:p xmlns:a="http://schemas.openxmlformats.org/drawingml/2006/main">
             <a:pPr algn="r">
+              <a:buNone/>
               <a:defRPr sz="1725" b="1">
                 <a:solidFill>
                   <a:srgbClr val="667E95"/>
@@ -8642,6 +8745,7 @@
           <a:lstStyle xmlns:a="http://schemas.openxmlformats.org/drawingml/2006/main"/>
           <a:p xmlns:a="http://schemas.openxmlformats.org/drawingml/2006/main">
             <a:pPr algn="r">
+              <a:buNone/>
               <a:defRPr sz="1200" b="0">
                 <a:solidFill>
                   <a:srgbClr val="716B63"/>
@@ -8659,7 +8763,7 @@
       </p:sp>
       <p:cxnSp>
         <p:nvCxnSpPr>
-          <p:cNvPr id="50" name=""/>
+          <p:cNvPr id="98" name=""/>
           <p:cNvCxnSpPr/>
           <p:nvPr/>
         </p:nvCxnSpPr>
@@ -8709,6 +8813,7 @@
           <a:lstStyle xmlns:a="http://schemas.openxmlformats.org/drawingml/2006/main"/>
           <a:p xmlns:a="http://schemas.openxmlformats.org/drawingml/2006/main">
             <a:pPr algn="l">
+              <a:buNone/>
               <a:defRPr sz="1650" b="1">
                 <a:solidFill>
                   <a:srgbClr val="24211D"/>
@@ -8754,6 +8859,7 @@
           <a:lstStyle xmlns:a="http://schemas.openxmlformats.org/drawingml/2006/main"/>
           <a:p xmlns:a="http://schemas.openxmlformats.org/drawingml/2006/main">
             <a:pPr algn="l">
+              <a:buNone/>
               <a:defRPr sz="1200" b="0">
                 <a:solidFill>
                   <a:srgbClr val="716B63"/>
@@ -8799,6 +8905,7 @@
           <a:lstStyle xmlns:a="http://schemas.openxmlformats.org/drawingml/2006/main"/>
           <a:p xmlns:a="http://schemas.openxmlformats.org/drawingml/2006/main">
             <a:pPr algn="r">
+              <a:buNone/>
               <a:defRPr sz="2100" b="1">
                 <a:solidFill>
                   <a:srgbClr val="B76043"/>
@@ -8844,6 +8951,7 @@
           <a:lstStyle xmlns:a="http://schemas.openxmlformats.org/drawingml/2006/main"/>
           <a:p xmlns:a="http://schemas.openxmlformats.org/drawingml/2006/main">
             <a:pPr algn="r">
+              <a:buNone/>
               <a:defRPr sz="1725" b="1">
                 <a:solidFill>
                   <a:srgbClr val="667E95"/>
@@ -8889,6 +8997,7 @@
           <a:lstStyle xmlns:a="http://schemas.openxmlformats.org/drawingml/2006/main"/>
           <a:p xmlns:a="http://schemas.openxmlformats.org/drawingml/2006/main">
             <a:pPr algn="r">
+              <a:buNone/>
               <a:defRPr sz="1200" b="0">
                 <a:solidFill>
                   <a:srgbClr val="716B63"/>
@@ -8906,7 +9015,7 @@
       </p:sp>
       <p:cxnSp>
         <p:nvCxnSpPr>
-          <p:cNvPr id="56" name=""/>
+          <p:cNvPr id="104" name=""/>
           <p:cNvCxnSpPr/>
           <p:nvPr/>
         </p:nvCxnSpPr>
@@ -8956,6 +9065,7 @@
           <a:lstStyle xmlns:a="http://schemas.openxmlformats.org/drawingml/2006/main"/>
           <a:p xmlns:a="http://schemas.openxmlformats.org/drawingml/2006/main">
             <a:pPr algn="l">
+              <a:buNone/>
               <a:defRPr sz="1650" b="1">
                 <a:solidFill>
                   <a:srgbClr val="24211D"/>
@@ -9001,6 +9111,7 @@
           <a:lstStyle xmlns:a="http://schemas.openxmlformats.org/drawingml/2006/main"/>
           <a:p xmlns:a="http://schemas.openxmlformats.org/drawingml/2006/main">
             <a:pPr algn="l">
+              <a:buNone/>
               <a:defRPr sz="1200" b="0">
                 <a:solidFill>
                   <a:srgbClr val="716B63"/>
@@ -9046,6 +9157,7 @@
           <a:lstStyle xmlns:a="http://schemas.openxmlformats.org/drawingml/2006/main"/>
           <a:p xmlns:a="http://schemas.openxmlformats.org/drawingml/2006/main">
             <a:pPr algn="r">
+              <a:buNone/>
               <a:defRPr sz="2100" b="1">
                 <a:solidFill>
                   <a:srgbClr val="B76043"/>
@@ -9091,6 +9203,7 @@
           <a:lstStyle xmlns:a="http://schemas.openxmlformats.org/drawingml/2006/main"/>
           <a:p xmlns:a="http://schemas.openxmlformats.org/drawingml/2006/main">
             <a:pPr algn="r">
+              <a:buNone/>
               <a:defRPr sz="1725" b="1">
                 <a:solidFill>
                   <a:srgbClr val="667E95"/>
@@ -9136,6 +9249,7 @@
           <a:lstStyle xmlns:a="http://schemas.openxmlformats.org/drawingml/2006/main"/>
           <a:p xmlns:a="http://schemas.openxmlformats.org/drawingml/2006/main">
             <a:pPr algn="r">
+              <a:buNone/>
               <a:defRPr sz="1200" b="0">
                 <a:solidFill>
                   <a:srgbClr val="716B63"/>
@@ -9216,6 +9330,7 @@
           <a:lstStyle xmlns:a="http://schemas.openxmlformats.org/drawingml/2006/main"/>
           <a:p xmlns:a="http://schemas.openxmlformats.org/drawingml/2006/main">
             <a:pPr algn="l">
+              <a:buNone/>
               <a:defRPr sz="1875" b="1">
                 <a:solidFill>
                   <a:srgbClr val="24211D"/>
@@ -9261,6 +9376,7 @@
           <a:lstStyle xmlns:a="http://schemas.openxmlformats.org/drawingml/2006/main"/>
           <a:p xmlns:a="http://schemas.openxmlformats.org/drawingml/2006/main">
             <a:pPr algn="l">
+              <a:buNone/>
               <a:defRPr sz="1500" b="0">
                 <a:solidFill>
                   <a:srgbClr val="716B63"/>
@@ -9338,6 +9454,7 @@
           <a:lstStyle xmlns:a="http://schemas.openxmlformats.org/drawingml/2006/main"/>
           <a:p xmlns:a="http://schemas.openxmlformats.org/drawingml/2006/main">
             <a:pPr algn="l">
+              <a:buNone/>
               <a:defRPr sz="1125" b="1">
                 <a:solidFill>
                   <a:srgbClr val="B76043"/>
@@ -9348,7 +9465,7 @@
               </a:defRPr>
             </a:pPr>
             <a:r>
-              <a:t>OUTLOOK SIGNALS</a:t>
+              <a:t>OUTLOOK AI SIGNALS</a:t>
             </a:r>
           </a:p>
         </p:txBody>
@@ -9383,6 +9500,7 @@
           <a:lstStyle xmlns:a="http://schemas.openxmlformats.org/drawingml/2006/main"/>
           <a:p xmlns:a="http://schemas.openxmlformats.org/drawingml/2006/main">
             <a:pPr algn="l">
+              <a:buNone/>
               <a:defRPr sz="3150" b="1">
                 <a:solidFill>
                   <a:srgbClr val="24211D"/>
@@ -9400,7 +9518,7 @@
       </p:sp>
       <p:cxnSp>
         <p:nvCxnSpPr>
-          <p:cNvPr id="16" name=""/>
+          <p:cNvPr id="38" name=""/>
           <p:cNvCxnSpPr/>
           <p:nvPr/>
         </p:nvCxnSpPr>
@@ -9450,6 +9568,7 @@
           <a:lstStyle xmlns:a="http://schemas.openxmlformats.org/drawingml/2006/main"/>
           <a:p xmlns:a="http://schemas.openxmlformats.org/drawingml/2006/main">
             <a:pPr algn="r">
+              <a:buNone/>
               <a:defRPr sz="1050" b="0">
                 <a:solidFill>
                   <a:srgbClr val="716B63"/>
@@ -9467,18 +9586,18 @@
       </p:sp>
       <p:pic>
         <p:nvPicPr>
-          <p:cNvPr id="18" name=""/>
+          <p:cNvPr id="40" name=""/>
           <p:cNvPicPr>
             <a:picLocks xmlns:a="http://schemas.openxmlformats.org/drawingml/2006/main" noChangeAspect="1"/>
           </p:cNvPicPr>
           <p:nvPr/>
         </p:nvPicPr>
         <p:blipFill>
-          <a:blip xmlns:r="http://schemas.openxmlformats.org/officeDocument/2006/relationships" xmlns:a="http://schemas.openxmlformats.org/drawingml/2006/main" r:embed="Rd0860f257c8f47af"/>
+          <a:blip xmlns:r="http://schemas.openxmlformats.org/officeDocument/2006/relationships" xmlns:a="http://schemas.openxmlformats.org/drawingml/2006/main" r:embed="R63d95c7ea24b4aef"/>
           <a:stretch xmlns:a="http://schemas.openxmlformats.org/drawingml/2006/main"/>
         </p:blipFill>
         <p:spPr>
-          <a:xfrm xmlns:a="http://schemas.openxmlformats.org/drawingml/2006/main">
+          <a:xfrm xmlns:a="http://schemas.openxmlformats.org/drawingml/2006/main" flipH="0" flipV="0">
             <a:off x="495300" y="1669256"/>
             <a:ext cx="7239000" cy="4071938"/>
           </a:xfrm>
@@ -9550,6 +9669,7 @@
           <a:lstStyle xmlns:a="http://schemas.openxmlformats.org/drawingml/2006/main"/>
           <a:p xmlns:a="http://schemas.openxmlformats.org/drawingml/2006/main">
             <a:pPr algn="l">
+              <a:buNone/>
               <a:defRPr sz="1800" b="1">
                 <a:solidFill>
                   <a:srgbClr val="B76043"/>
@@ -9595,6 +9715,7 @@
           <a:lstStyle xmlns:a="http://schemas.openxmlformats.org/drawingml/2006/main"/>
           <a:p xmlns:a="http://schemas.openxmlformats.org/drawingml/2006/main">
             <a:pPr algn="l">
+              <a:buNone/>
               <a:defRPr sz="1350" b="0">
                 <a:solidFill>
                   <a:srgbClr val="716B63"/>
@@ -9640,6 +9761,7 @@
           <a:lstStyle xmlns:a="http://schemas.openxmlformats.org/drawingml/2006/main"/>
           <a:p xmlns:a="http://schemas.openxmlformats.org/drawingml/2006/main">
             <a:pPr algn="l">
+              <a:buNone/>
               <a:defRPr sz="4200" b="1">
                 <a:solidFill>
                   <a:srgbClr val="B76043"/>
@@ -9657,7 +9779,7 @@
       </p:sp>
       <p:cxnSp>
         <p:nvCxnSpPr>
-          <p:cNvPr id="23" name=""/>
+          <p:cNvPr id="45" name=""/>
           <p:cNvCxnSpPr/>
           <p:nvPr/>
         </p:nvCxnSpPr>
@@ -9707,6 +9829,7 @@
           <a:lstStyle xmlns:a="http://schemas.openxmlformats.org/drawingml/2006/main"/>
           <a:p xmlns:a="http://schemas.openxmlformats.org/drawingml/2006/main">
             <a:pPr algn="l">
+              <a:buNone/>
               <a:defRPr sz="1950" b="1">
                 <a:solidFill>
                   <a:srgbClr val="B76043"/>
@@ -9752,6 +9875,7 @@
           <a:lstStyle xmlns:a="http://schemas.openxmlformats.org/drawingml/2006/main"/>
           <a:p xmlns:a="http://schemas.openxmlformats.org/drawingml/2006/main">
             <a:pPr algn="l">
+              <a:buNone/>
               <a:defRPr sz="1950" b="1">
                 <a:solidFill>
                   <a:srgbClr val="667E95"/>
@@ -9797,6 +9921,7 @@
           <a:lstStyle xmlns:a="http://schemas.openxmlformats.org/drawingml/2006/main"/>
           <a:p xmlns:a="http://schemas.openxmlformats.org/drawingml/2006/main">
             <a:pPr algn="l">
+              <a:buNone/>
               <a:defRPr sz="1500" b="0">
                 <a:solidFill>
                   <a:srgbClr val="716B63"/>
@@ -9874,6 +9999,7 @@
           <a:lstStyle xmlns:a="http://schemas.openxmlformats.org/drawingml/2006/main"/>
           <a:p xmlns:a="http://schemas.openxmlformats.org/drawingml/2006/main">
             <a:pPr algn="l">
+              <a:buNone/>
               <a:defRPr sz="1125" b="1">
                 <a:solidFill>
                   <a:srgbClr val="B76043"/>
@@ -9884,7 +10010,7 @@
               </a:defRPr>
             </a:pPr>
             <a:r>
-              <a:t>OUTLOOK SIGNALS</a:t>
+              <a:t>OUTLOOK AI SIGNALS</a:t>
             </a:r>
           </a:p>
         </p:txBody>
@@ -9919,6 +10045,7 @@
           <a:lstStyle xmlns:a="http://schemas.openxmlformats.org/drawingml/2006/main"/>
           <a:p xmlns:a="http://schemas.openxmlformats.org/drawingml/2006/main">
             <a:pPr algn="l">
+              <a:buNone/>
               <a:defRPr sz="3150" b="1">
                 <a:solidFill>
                   <a:srgbClr val="24211D"/>
@@ -9936,7 +10063,7 @@
       </p:sp>
       <p:cxnSp>
         <p:nvCxnSpPr>
-          <p:cNvPr id="31" name=""/>
+          <p:cNvPr id="87" name=""/>
           <p:cNvCxnSpPr/>
           <p:nvPr/>
         </p:nvCxnSpPr>
@@ -9986,6 +10113,7 @@
           <a:lstStyle xmlns:a="http://schemas.openxmlformats.org/drawingml/2006/main"/>
           <a:p xmlns:a="http://schemas.openxmlformats.org/drawingml/2006/main">
             <a:pPr algn="r">
+              <a:buNone/>
               <a:defRPr sz="1050" b="0">
                 <a:solidFill>
                   <a:srgbClr val="716B63"/>
@@ -10003,21 +10131,21 @@
       </p:sp>
       <p:pic>
         <p:nvPicPr>
-          <p:cNvPr id="33" name=""/>
+          <p:cNvPr id="89" name=""/>
           <p:cNvPicPr>
             <a:picLocks xmlns:a="http://schemas.openxmlformats.org/drawingml/2006/main" noChangeAspect="1"/>
           </p:cNvPicPr>
           <p:nvPr/>
         </p:nvPicPr>
         <p:blipFill>
-          <a:blip xmlns:r="http://schemas.openxmlformats.org/officeDocument/2006/relationships" xmlns:a="http://schemas.openxmlformats.org/drawingml/2006/main" r:embed="R9f3964578165440e"/>
+          <a:blip xmlns:r="http://schemas.openxmlformats.org/officeDocument/2006/relationships" xmlns:a="http://schemas.openxmlformats.org/drawingml/2006/main" r:embed="R11760ad54e374215"/>
           <a:srcRect xmlns:a="http://schemas.openxmlformats.org/drawingml/2006/main" l="18378" t="0" r="18378" b="0"/>
           <a:stretch xmlns:a="http://schemas.openxmlformats.org/drawingml/2006/main">
             <a:fillRect l="0" t="0" r="0" b="0"/>
           </a:stretch>
         </p:blipFill>
         <p:spPr>
-          <a:xfrm xmlns:a="http://schemas.openxmlformats.org/drawingml/2006/main">
+          <a:xfrm xmlns:a="http://schemas.openxmlformats.org/drawingml/2006/main" flipH="0" flipV="0">
             <a:off x="7543800" y="1752600"/>
             <a:ext cx="3962400" cy="3524250"/>
           </a:xfrm>
@@ -10061,7 +10189,7 @@
       </p:sp>
       <p:cxnSp>
         <p:nvCxnSpPr>
-          <p:cNvPr id="35" name=""/>
+          <p:cNvPr id="91" name=""/>
           <p:cNvCxnSpPr/>
           <p:nvPr/>
         </p:nvCxnSpPr>
@@ -10083,7 +10211,7 @@
       </p:cxnSp>
       <p:cxnSp>
         <p:nvCxnSpPr>
-          <p:cNvPr id="36" name=""/>
+          <p:cNvPr id="92" name=""/>
           <p:cNvCxnSpPr/>
           <p:nvPr/>
         </p:nvCxnSpPr>
@@ -10105,7 +10233,7 @@
       </p:cxnSp>
       <p:cxnSp>
         <p:nvCxnSpPr>
-          <p:cNvPr id="37" name=""/>
+          <p:cNvPr id="93" name=""/>
           <p:cNvCxnSpPr/>
           <p:nvPr/>
         </p:nvCxnSpPr>
@@ -10190,6 +10318,7 @@
           <a:lstStyle xmlns:a="http://schemas.openxmlformats.org/drawingml/2006/main"/>
           <a:p xmlns:a="http://schemas.openxmlformats.org/drawingml/2006/main">
             <a:pPr algn="l">
+              <a:buNone/>
               <a:defRPr sz="1125" b="1">
                 <a:solidFill>
                   <a:srgbClr val="B76043"/>
@@ -10235,6 +10364,7 @@
           <a:lstStyle xmlns:a="http://schemas.openxmlformats.org/drawingml/2006/main"/>
           <a:p xmlns:a="http://schemas.openxmlformats.org/drawingml/2006/main">
             <a:pPr algn="l">
+              <a:buNone/>
               <a:defRPr sz="1650" b="1">
                 <a:solidFill>
                   <a:srgbClr val="24211D"/>
@@ -10280,6 +10410,7 @@
           <a:lstStyle xmlns:a="http://schemas.openxmlformats.org/drawingml/2006/main"/>
           <a:p xmlns:a="http://schemas.openxmlformats.org/drawingml/2006/main">
             <a:pPr algn="l">
+              <a:buNone/>
               <a:defRPr sz="1350" b="0">
                 <a:solidFill>
                   <a:srgbClr val="716B63"/>
@@ -10362,6 +10493,7 @@
           <a:lstStyle xmlns:a="http://schemas.openxmlformats.org/drawingml/2006/main"/>
           <a:p xmlns:a="http://schemas.openxmlformats.org/drawingml/2006/main">
             <a:pPr algn="l">
+              <a:buNone/>
               <a:defRPr sz="1125" b="1">
                 <a:solidFill>
                   <a:srgbClr val="B76043"/>
@@ -10407,6 +10539,7 @@
           <a:lstStyle xmlns:a="http://schemas.openxmlformats.org/drawingml/2006/main"/>
           <a:p xmlns:a="http://schemas.openxmlformats.org/drawingml/2006/main">
             <a:pPr algn="l">
+              <a:buNone/>
               <a:defRPr sz="1650" b="1">
                 <a:solidFill>
                   <a:srgbClr val="24211D"/>
@@ -10452,6 +10585,7 @@
           <a:lstStyle xmlns:a="http://schemas.openxmlformats.org/drawingml/2006/main"/>
           <a:p xmlns:a="http://schemas.openxmlformats.org/drawingml/2006/main">
             <a:pPr algn="l">
+              <a:buNone/>
               <a:defRPr sz="1350" b="0">
                 <a:solidFill>
                   <a:srgbClr val="716B63"/>
@@ -10533,6 +10667,7 @@
           <a:lstStyle xmlns:a="http://schemas.openxmlformats.org/drawingml/2006/main"/>
           <a:p xmlns:a="http://schemas.openxmlformats.org/drawingml/2006/main">
             <a:pPr algn="l">
+              <a:buNone/>
               <a:defRPr sz="1125" b="1">
                 <a:solidFill>
                   <a:srgbClr val="B76043"/>
@@ -10578,6 +10713,7 @@
           <a:lstStyle xmlns:a="http://schemas.openxmlformats.org/drawingml/2006/main"/>
           <a:p xmlns:a="http://schemas.openxmlformats.org/drawingml/2006/main">
             <a:pPr algn="l">
+              <a:buNone/>
               <a:defRPr sz="1650" b="1">
                 <a:solidFill>
                   <a:srgbClr val="24211D"/>
@@ -10623,6 +10759,7 @@
           <a:lstStyle xmlns:a="http://schemas.openxmlformats.org/drawingml/2006/main"/>
           <a:p xmlns:a="http://schemas.openxmlformats.org/drawingml/2006/main">
             <a:pPr algn="l">
+              <a:buNone/>
               <a:defRPr sz="1350" b="0">
                 <a:solidFill>
                   <a:srgbClr val="716B63"/>
@@ -10704,6 +10841,7 @@
           <a:lstStyle xmlns:a="http://schemas.openxmlformats.org/drawingml/2006/main"/>
           <a:p xmlns:a="http://schemas.openxmlformats.org/drawingml/2006/main">
             <a:pPr algn="l">
+              <a:buNone/>
               <a:defRPr sz="1125" b="1">
                 <a:solidFill>
                   <a:srgbClr val="B76043"/>
@@ -10749,6 +10887,7 @@
           <a:lstStyle xmlns:a="http://schemas.openxmlformats.org/drawingml/2006/main"/>
           <a:p xmlns:a="http://schemas.openxmlformats.org/drawingml/2006/main">
             <a:pPr algn="l">
+              <a:buNone/>
               <a:defRPr sz="1650" b="1">
                 <a:solidFill>
                   <a:srgbClr val="24211D"/>
@@ -10794,6 +10933,7 @@
           <a:lstStyle xmlns:a="http://schemas.openxmlformats.org/drawingml/2006/main"/>
           <a:p xmlns:a="http://schemas.openxmlformats.org/drawingml/2006/main">
             <a:pPr algn="l">
+              <a:buNone/>
               <a:defRPr sz="1350" b="0">
                 <a:solidFill>
                   <a:srgbClr val="716B63"/>
@@ -10840,6 +10980,7 @@
           <a:lstStyle xmlns:a="http://schemas.openxmlformats.org/drawingml/2006/main"/>
           <a:p xmlns:a="http://schemas.openxmlformats.org/drawingml/2006/main">
             <a:pPr algn="ctr">
+              <a:buNone/>
               <a:defRPr sz="1350" b="1">
                 <a:solidFill>
                   <a:srgbClr val="B76043"/>
@@ -10857,7 +10998,7 @@
       </p:sp>
       <p:cxnSp>
         <p:nvCxnSpPr>
-          <p:cNvPr id="55" name=""/>
+          <p:cNvPr id="111" name=""/>
           <p:cNvCxnSpPr/>
           <p:nvPr/>
         </p:nvCxnSpPr>
@@ -10907,6 +11048,7 @@
           <a:lstStyle xmlns:a="http://schemas.openxmlformats.org/drawingml/2006/main"/>
           <a:p xmlns:a="http://schemas.openxmlformats.org/drawingml/2006/main">
             <a:pPr algn="ctr">
+              <a:buNone/>
               <a:defRPr sz="1500" b="0">
                 <a:solidFill>
                   <a:srgbClr val="716B63"/>
@@ -10981,6 +11123,7 @@
           <a:lstStyle xmlns:a="http://schemas.openxmlformats.org/drawingml/2006/main"/>
           <a:p xmlns:a="http://schemas.openxmlformats.org/drawingml/2006/main">
             <a:pPr algn="l">
+              <a:buNone/>
               <a:defRPr sz="1125" b="1">
                 <a:solidFill>
                   <a:srgbClr val="B76043"/>
@@ -10991,7 +11134,7 @@
               </a:defRPr>
             </a:pPr>
             <a:r>
-              <a:t>OUTLOOK SIGNALS</a:t>
+              <a:t>OUTLOOK AI SIGNALS</a:t>
             </a:r>
           </a:p>
         </p:txBody>
@@ -11026,6 +11169,7 @@
           <a:lstStyle xmlns:a="http://schemas.openxmlformats.org/drawingml/2006/main"/>
           <a:p xmlns:a="http://schemas.openxmlformats.org/drawingml/2006/main">
             <a:pPr algn="l">
+              <a:buNone/>
               <a:defRPr sz="3150" b="1">
                 <a:solidFill>
                   <a:srgbClr val="24211D"/>
@@ -11043,7 +11187,7 @@
       </p:sp>
       <p:cxnSp>
         <p:nvCxnSpPr>
-          <p:cNvPr id="21" name=""/>
+          <p:cNvPr id="31" name=""/>
           <p:cNvCxnSpPr/>
           <p:nvPr/>
         </p:nvCxnSpPr>
@@ -11093,6 +11237,7 @@
           <a:lstStyle xmlns:a="http://schemas.openxmlformats.org/drawingml/2006/main"/>
           <a:p xmlns:a="http://schemas.openxmlformats.org/drawingml/2006/main">
             <a:pPr algn="r">
+              <a:buNone/>
               <a:defRPr sz="1050" b="0">
                 <a:solidFill>
                   <a:srgbClr val="716B63"/>
@@ -11110,7 +11255,7 @@
       </p:sp>
       <p:cxnSp>
         <p:nvCxnSpPr>
-          <p:cNvPr id="23" name=""/>
+          <p:cNvPr id="33" name=""/>
           <p:cNvCxnSpPr/>
           <p:nvPr/>
         </p:nvCxnSpPr>
@@ -11230,6 +11375,7 @@
           <a:lstStyle xmlns:a="http://schemas.openxmlformats.org/drawingml/2006/main"/>
           <a:p xmlns:a="http://schemas.openxmlformats.org/drawingml/2006/main">
             <a:pPr algn="l">
+              <a:buNone/>
               <a:defRPr sz="2025" b="1">
                 <a:solidFill>
                   <a:srgbClr val="B76043"/>
@@ -11275,6 +11421,7 @@
           <a:lstStyle xmlns:a="http://schemas.openxmlformats.org/drawingml/2006/main"/>
           <a:p xmlns:a="http://schemas.openxmlformats.org/drawingml/2006/main">
             <a:pPr algn="l">
+              <a:buNone/>
               <a:defRPr sz="1650" b="1">
                 <a:solidFill>
                   <a:srgbClr val="24211D"/>
@@ -11320,6 +11467,7 @@
           <a:lstStyle xmlns:a="http://schemas.openxmlformats.org/drawingml/2006/main"/>
           <a:p xmlns:a="http://schemas.openxmlformats.org/drawingml/2006/main">
             <a:pPr algn="l">
+              <a:buNone/>
               <a:defRPr sz="1500" b="0">
                 <a:solidFill>
                   <a:srgbClr val="716B63"/>
@@ -11403,6 +11551,7 @@
           <a:lstStyle xmlns:a="http://schemas.openxmlformats.org/drawingml/2006/main"/>
           <a:p xmlns:a="http://schemas.openxmlformats.org/drawingml/2006/main">
             <a:pPr algn="ctr">
+              <a:buNone/>
               <a:defRPr sz="1200" b="1">
                 <a:solidFill>
                   <a:srgbClr val="B76043"/>
@@ -11448,6 +11597,7 @@
           <a:lstStyle xmlns:a="http://schemas.openxmlformats.org/drawingml/2006/main"/>
           <a:p xmlns:a="http://schemas.openxmlformats.org/drawingml/2006/main">
             <a:pPr algn="l">
+              <a:buNone/>
               <a:defRPr sz="2025" b="1">
                 <a:solidFill>
                   <a:srgbClr val="667E95"/>
@@ -11493,6 +11643,7 @@
           <a:lstStyle xmlns:a="http://schemas.openxmlformats.org/drawingml/2006/main"/>
           <a:p xmlns:a="http://schemas.openxmlformats.org/drawingml/2006/main">
             <a:pPr algn="l">
+              <a:buNone/>
               <a:defRPr sz="1650" b="1">
                 <a:solidFill>
                   <a:srgbClr val="24211D"/>
@@ -11538,6 +11689,7 @@
           <a:lstStyle xmlns:a="http://schemas.openxmlformats.org/drawingml/2006/main"/>
           <a:p xmlns:a="http://schemas.openxmlformats.org/drawingml/2006/main">
             <a:pPr algn="l">
+              <a:buNone/>
               <a:defRPr sz="1500" b="0">
                 <a:solidFill>
                   <a:srgbClr val="716B63"/>
@@ -11621,6 +11773,7 @@
           <a:lstStyle xmlns:a="http://schemas.openxmlformats.org/drawingml/2006/main"/>
           <a:p xmlns:a="http://schemas.openxmlformats.org/drawingml/2006/main">
             <a:pPr algn="ctr">
+              <a:buNone/>
               <a:defRPr sz="1200" b="1">
                 <a:solidFill>
                   <a:srgbClr val="667E95"/>
@@ -11666,6 +11819,7 @@
           <a:lstStyle xmlns:a="http://schemas.openxmlformats.org/drawingml/2006/main"/>
           <a:p xmlns:a="http://schemas.openxmlformats.org/drawingml/2006/main">
             <a:pPr algn="ctr">
+              <a:buNone/>
               <a:defRPr sz="1650" b="1">
                 <a:solidFill>
                   <a:srgbClr val="B76043"/>
@@ -11740,6 +11894,7 @@
           <a:lstStyle xmlns:a="http://schemas.openxmlformats.org/drawingml/2006/main"/>
           <a:p xmlns:a="http://schemas.openxmlformats.org/drawingml/2006/main">
             <a:pPr algn="l">
+              <a:buNone/>
               <a:defRPr sz="1125" b="1">
                 <a:solidFill>
                   <a:srgbClr val="B76043"/>
@@ -11750,7 +11905,7 @@
               </a:defRPr>
             </a:pPr>
             <a:r>
-              <a:t>OUTLOOK SIGNALS</a:t>
+              <a:t>OUTLOOK AI SIGNALS</a:t>
             </a:r>
           </a:p>
         </p:txBody>
@@ -11785,6 +11940,7 @@
           <a:lstStyle xmlns:a="http://schemas.openxmlformats.org/drawingml/2006/main"/>
           <a:p xmlns:a="http://schemas.openxmlformats.org/drawingml/2006/main">
             <a:pPr algn="l">
+              <a:buNone/>
               <a:defRPr sz="3150" b="1">
                 <a:solidFill>
                   <a:srgbClr val="24211D"/>
@@ -11802,7 +11958,7 @@
       </p:sp>
       <p:cxnSp>
         <p:nvCxnSpPr>
-          <p:cNvPr id="20" name=""/>
+          <p:cNvPr id="26" name=""/>
           <p:cNvCxnSpPr/>
           <p:nvPr/>
         </p:nvCxnSpPr>
@@ -11852,6 +12008,7 @@
           <a:lstStyle xmlns:a="http://schemas.openxmlformats.org/drawingml/2006/main"/>
           <a:p xmlns:a="http://schemas.openxmlformats.org/drawingml/2006/main">
             <a:pPr algn="r">
+              <a:buNone/>
               <a:defRPr sz="1050" b="0">
                 <a:solidFill>
                   <a:srgbClr val="716B63"/>
@@ -12037,6 +12194,7 @@
           <a:lstStyle xmlns:a="http://schemas.openxmlformats.org/drawingml/2006/main"/>
           <a:p xmlns:a="http://schemas.openxmlformats.org/drawingml/2006/main">
             <a:pPr algn="l">
+              <a:buNone/>
               <a:defRPr sz="1500" b="1">
                 <a:solidFill>
                   <a:srgbClr val="716B63"/>
@@ -12082,6 +12240,7 @@
           <a:lstStyle xmlns:a="http://schemas.openxmlformats.org/drawingml/2006/main"/>
           <a:p xmlns:a="http://schemas.openxmlformats.org/drawingml/2006/main">
             <a:pPr algn="l">
+              <a:buNone/>
               <a:defRPr sz="1500" b="1">
                 <a:solidFill>
                   <a:srgbClr val="667E95"/>
@@ -12127,6 +12286,7 @@
           <a:lstStyle xmlns:a="http://schemas.openxmlformats.org/drawingml/2006/main"/>
           <a:p xmlns:a="http://schemas.openxmlformats.org/drawingml/2006/main">
             <a:pPr algn="l">
+              <a:buNone/>
               <a:defRPr sz="1500" b="1">
                 <a:solidFill>
                   <a:srgbClr val="B76043"/>
@@ -12172,6 +12332,7 @@
           <a:lstStyle xmlns:a="http://schemas.openxmlformats.org/drawingml/2006/main"/>
           <a:p xmlns:a="http://schemas.openxmlformats.org/drawingml/2006/main">
             <a:pPr algn="ctr">
+              <a:buNone/>
               <a:defRPr sz="2025" b="1">
                 <a:solidFill>
                   <a:srgbClr val="FFFFFF"/>
@@ -12217,6 +12378,7 @@
           <a:lstStyle xmlns:a="http://schemas.openxmlformats.org/drawingml/2006/main"/>
           <a:p xmlns:a="http://schemas.openxmlformats.org/drawingml/2006/main">
             <a:pPr algn="l">
+              <a:buNone/>
               <a:defRPr sz="1725" b="1">
                 <a:solidFill>
                   <a:srgbClr val="24211D"/>
@@ -12262,6 +12424,7 @@
           <a:lstStyle xmlns:a="http://schemas.openxmlformats.org/drawingml/2006/main"/>
           <a:p xmlns:a="http://schemas.openxmlformats.org/drawingml/2006/main">
             <a:pPr algn="l">
+              <a:buNone/>
               <a:defRPr sz="1725" b="1">
                 <a:solidFill>
                   <a:srgbClr val="24211D"/>
@@ -12307,6 +12470,7 @@
           <a:lstStyle xmlns:a="http://schemas.openxmlformats.org/drawingml/2006/main"/>
           <a:p xmlns:a="http://schemas.openxmlformats.org/drawingml/2006/main">
             <a:pPr algn="l">
+              <a:buNone/>
               <a:defRPr sz="1725" b="1">
                 <a:solidFill>
                   <a:srgbClr val="24211D"/>
@@ -12352,6 +12516,7 @@
           <a:lstStyle xmlns:a="http://schemas.openxmlformats.org/drawingml/2006/main"/>
           <a:p xmlns:a="http://schemas.openxmlformats.org/drawingml/2006/main">
             <a:pPr algn="l">
+              <a:buNone/>
               <a:defRPr sz="1725" b="1">
                 <a:solidFill>
                   <a:srgbClr val="24211D"/>
@@ -12397,6 +12562,7 @@
           <a:lstStyle xmlns:a="http://schemas.openxmlformats.org/drawingml/2006/main"/>
           <a:p xmlns:a="http://schemas.openxmlformats.org/drawingml/2006/main">
             <a:pPr algn="ctr">
+              <a:buNone/>
               <a:defRPr sz="1650" b="1">
                 <a:solidFill>
                   <a:srgbClr val="B76043"/>
